--- a/(7.22) 경험치 이차방정식.pptx
+++ b/(7.22) 경험치 이차방정식.pptx
@@ -13,6 +13,7 @@
     <p:sldId id="261" r:id="rId7"/>
     <p:sldId id="262" r:id="rId8"/>
     <p:sldId id="263" r:id="rId9"/>
+    <p:sldId id="264" r:id="rId10"/>
   </p:sldIdLst>
   <p:sldSz cx="12192000" cy="6858000"/>
   <p:notesSz cx="6858000" cy="9144000"/>
@@ -261,7 +262,7 @@
           <a:p>
             <a:fld id="{A4B2C518-2767-440D-A99E-B44C09431C85}" type="datetimeFigureOut">
               <a:rPr lang="ko-KR" altLang="en-US" smtClean="0"/>
-              <a:t>2026-07-22</a:t>
+              <a:t>2026-07-23</a:t>
             </a:fld>
             <a:endParaRPr lang="ko-KR" altLang="en-US"/>
           </a:p>
@@ -431,7 +432,7 @@
           <a:p>
             <a:fld id="{A4B2C518-2767-440D-A99E-B44C09431C85}" type="datetimeFigureOut">
               <a:rPr lang="ko-KR" altLang="en-US" smtClean="0"/>
-              <a:t>2026-07-22</a:t>
+              <a:t>2026-07-23</a:t>
             </a:fld>
             <a:endParaRPr lang="ko-KR" altLang="en-US"/>
           </a:p>
@@ -611,7 +612,7 @@
           <a:p>
             <a:fld id="{A4B2C518-2767-440D-A99E-B44C09431C85}" type="datetimeFigureOut">
               <a:rPr lang="ko-KR" altLang="en-US" smtClean="0"/>
-              <a:t>2026-07-22</a:t>
+              <a:t>2026-07-23</a:t>
             </a:fld>
             <a:endParaRPr lang="ko-KR" altLang="en-US"/>
           </a:p>
@@ -781,7 +782,7 @@
           <a:p>
             <a:fld id="{A4B2C518-2767-440D-A99E-B44C09431C85}" type="datetimeFigureOut">
               <a:rPr lang="ko-KR" altLang="en-US" smtClean="0"/>
-              <a:t>2026-07-22</a:t>
+              <a:t>2026-07-23</a:t>
             </a:fld>
             <a:endParaRPr lang="ko-KR" altLang="en-US"/>
           </a:p>
@@ -1027,7 +1028,7 @@
           <a:p>
             <a:fld id="{A4B2C518-2767-440D-A99E-B44C09431C85}" type="datetimeFigureOut">
               <a:rPr lang="ko-KR" altLang="en-US" smtClean="0"/>
-              <a:t>2026-07-22</a:t>
+              <a:t>2026-07-23</a:t>
             </a:fld>
             <a:endParaRPr lang="ko-KR" altLang="en-US"/>
           </a:p>
@@ -1259,7 +1260,7 @@
           <a:p>
             <a:fld id="{A4B2C518-2767-440D-A99E-B44C09431C85}" type="datetimeFigureOut">
               <a:rPr lang="ko-KR" altLang="en-US" smtClean="0"/>
-              <a:t>2026-07-22</a:t>
+              <a:t>2026-07-23</a:t>
             </a:fld>
             <a:endParaRPr lang="ko-KR" altLang="en-US"/>
           </a:p>
@@ -1626,7 +1627,7 @@
           <a:p>
             <a:fld id="{A4B2C518-2767-440D-A99E-B44C09431C85}" type="datetimeFigureOut">
               <a:rPr lang="ko-KR" altLang="en-US" smtClean="0"/>
-              <a:t>2026-07-22</a:t>
+              <a:t>2026-07-23</a:t>
             </a:fld>
             <a:endParaRPr lang="ko-KR" altLang="en-US"/>
           </a:p>
@@ -1744,7 +1745,7 @@
           <a:p>
             <a:fld id="{A4B2C518-2767-440D-A99E-B44C09431C85}" type="datetimeFigureOut">
               <a:rPr lang="ko-KR" altLang="en-US" smtClean="0"/>
-              <a:t>2026-07-22</a:t>
+              <a:t>2026-07-23</a:t>
             </a:fld>
             <a:endParaRPr lang="ko-KR" altLang="en-US"/>
           </a:p>
@@ -1839,7 +1840,7 @@
           <a:p>
             <a:fld id="{A4B2C518-2767-440D-A99E-B44C09431C85}" type="datetimeFigureOut">
               <a:rPr lang="ko-KR" altLang="en-US" smtClean="0"/>
-              <a:t>2026-07-22</a:t>
+              <a:t>2026-07-23</a:t>
             </a:fld>
             <a:endParaRPr lang="ko-KR" altLang="en-US"/>
           </a:p>
@@ -2116,7 +2117,7 @@
           <a:p>
             <a:fld id="{A4B2C518-2767-440D-A99E-B44C09431C85}" type="datetimeFigureOut">
               <a:rPr lang="ko-KR" altLang="en-US" smtClean="0"/>
-              <a:t>2026-07-22</a:t>
+              <a:t>2026-07-23</a:t>
             </a:fld>
             <a:endParaRPr lang="ko-KR" altLang="en-US"/>
           </a:p>
@@ -2369,7 +2370,7 @@
           <a:p>
             <a:fld id="{A4B2C518-2767-440D-A99E-B44C09431C85}" type="datetimeFigureOut">
               <a:rPr lang="ko-KR" altLang="en-US" smtClean="0"/>
-              <a:t>2026-07-22</a:t>
+              <a:t>2026-07-23</a:t>
             </a:fld>
             <a:endParaRPr lang="ko-KR" altLang="en-US"/>
           </a:p>
@@ -2582,7 +2583,7 @@
           <a:p>
             <a:fld id="{A4B2C518-2767-440D-A99E-B44C09431C85}" type="datetimeFigureOut">
               <a:rPr lang="ko-KR" altLang="en-US" smtClean="0"/>
-              <a:t>2026-07-22</a:t>
+              <a:t>2026-07-23</a:t>
             </a:fld>
             <a:endParaRPr lang="ko-KR" altLang="en-US"/>
           </a:p>
@@ -3522,7 +3523,7 @@
         </p:blipFill>
         <p:spPr>
           <a:xfrm>
-            <a:off x="234462" y="841574"/>
+            <a:off x="170454" y="128342"/>
             <a:ext cx="11723076" cy="5174852"/>
           </a:xfrm>
           <a:prstGeom prst="rect">
@@ -3530,6 +3531,323 @@
           </a:prstGeom>
         </p:spPr>
       </p:pic>
+      <p:sp>
+        <p:nvSpPr>
+          <p:cNvPr id="2" name="TextBox 1"/>
+          <p:cNvSpPr txBox="1"/>
+          <p:nvPr/>
+        </p:nvSpPr>
+        <p:spPr>
+          <a:xfrm>
+            <a:off x="170454" y="5449824"/>
+            <a:ext cx="7168896" cy="1200329"/>
+          </a:xfrm>
+          <a:prstGeom prst="rect">
+            <a:avLst/>
+          </a:prstGeom>
+          <a:noFill/>
+        </p:spPr>
+        <p:txBody>
+          <a:bodyPr wrap="square" rtlCol="0">
+            <a:spAutoFit/>
+          </a:bodyPr>
+          <a:lstStyle/>
+          <a:p>
+            <a:r>
+              <a:rPr lang="ko-KR" altLang="en-US" smtClean="0"/>
+              <a:t>우리나라 모바일 게임은 곡선의 경사가 급한 편이고</a:t>
+            </a:r>
+            <a:r>
+              <a:rPr lang="en-US" altLang="ko-KR" smtClean="0"/>
+              <a:t/>
+            </a:r>
+            <a:br>
+              <a:rPr lang="en-US" altLang="ko-KR" smtClean="0"/>
+            </a:br>
+            <a:r>
+              <a:rPr lang="ko-KR" altLang="en-US" smtClean="0"/>
+              <a:t>해외 유명 게임</a:t>
+            </a:r>
+            <a:r>
+              <a:rPr lang="en-US" altLang="ko-KR" smtClean="0"/>
+              <a:t>(</a:t>
+            </a:r>
+            <a:r>
+              <a:rPr lang="ko-KR" altLang="en-US" smtClean="0"/>
+              <a:t>예</a:t>
+            </a:r>
+            <a:r>
+              <a:rPr lang="en-US" altLang="ko-KR" smtClean="0"/>
+              <a:t>:[WOW])</a:t>
+            </a:r>
+            <a:r>
+              <a:rPr lang="ko-KR" altLang="en-US" smtClean="0"/>
+              <a:t>은 곡선의 경사가 완만한 편이다</a:t>
+            </a:r>
+            <a:r>
+              <a:rPr lang="en-US" altLang="ko-KR" smtClean="0"/>
+              <a:t>.</a:t>
+            </a:r>
+          </a:p>
+          <a:p>
+            <a:endParaRPr lang="en-US" altLang="ko-KR"/>
+          </a:p>
+          <a:p>
+            <a:endParaRPr lang="ko-KR" altLang="en-US"/>
+          </a:p>
+        </p:txBody>
+      </p:sp>
+      <p:sp>
+        <p:nvSpPr>
+          <p:cNvPr id="3" name="Rectangle 1"/>
+          <p:cNvSpPr>
+            <a:spLocks noChangeArrowheads="1"/>
+          </p:cNvSpPr>
+          <p:nvPr/>
+        </p:nvSpPr>
+        <p:spPr bwMode="auto">
+          <a:xfrm>
+            <a:off x="6342654" y="5449823"/>
+            <a:ext cx="5995552" cy="1200329"/>
+          </a:xfrm>
+          <a:prstGeom prst="rect">
+            <a:avLst/>
+          </a:prstGeom>
+          <a:noFill/>
+          <a:ln>
+            <a:noFill/>
+          </a:ln>
+          <a:effectLst/>
+          <a:extLst>
+            <a:ext uri="{909E8E84-426E-40DD-AFC4-6F175D3DCCD1}">
+              <a14:hiddenFill xmlns:a14="http://schemas.microsoft.com/office/drawing/2010/main">
+                <a:solidFill>
+                  <a:schemeClr val="accent1"/>
+                </a:solidFill>
+              </a14:hiddenFill>
+            </a:ext>
+            <a:ext uri="{91240B29-F687-4F45-9708-019B960494DF}">
+              <a14:hiddenLine xmlns:a14="http://schemas.microsoft.com/office/drawing/2010/main" w="9525">
+                <a:solidFill>
+                  <a:schemeClr val="tx1"/>
+                </a:solidFill>
+                <a:miter lim="800000"/>
+                <a:headEnd/>
+                <a:tailEnd/>
+              </a14:hiddenLine>
+            </a:ext>
+            <a:ext uri="{AF507438-7753-43E0-B8FC-AC1667EBCBE1}">
+              <a14:hiddenEffects xmlns:a14="http://schemas.microsoft.com/office/drawing/2010/main">
+                <a:effectLst>
+                  <a:outerShdw dist="35921" dir="2700000" algn="ctr" rotWithShape="0">
+                    <a:schemeClr val="bg2"/>
+                  </a:outerShdw>
+                </a:effectLst>
+              </a14:hiddenEffects>
+            </a:ext>
+          </a:extLst>
+        </p:spPr>
+        <p:txBody>
+          <a:bodyPr vert="horz" wrap="none" lIns="91440" tIns="45720" rIns="91440" bIns="45720" numCol="1" anchor="ctr" anchorCtr="0" compatLnSpc="1">
+            <a:prstTxWarp prst="textNoShape">
+              <a:avLst/>
+            </a:prstTxWarp>
+            <a:spAutoFit/>
+          </a:bodyPr>
+          <a:lstStyle/>
+          <a:p>
+            <a:pPr marL="0" marR="0" lvl="0" indent="0" algn="l" defTabSz="914400" rtl="0" eaLnBrk="0" fontAlgn="base" latinLnBrk="0" hangingPunct="0">
+              <a:lnSpc>
+                <a:spcPct val="100000"/>
+              </a:lnSpc>
+              <a:spcBef>
+                <a:spcPct val="0"/>
+              </a:spcBef>
+              <a:spcAft>
+                <a:spcPct val="0"/>
+              </a:spcAft>
+              <a:buClrTx/>
+              <a:buSzTx/>
+              <a:buFontTx/>
+              <a:buChar char="•"/>
+              <a:tabLst/>
+            </a:pPr>
+            <a:r>
+              <a:rPr kumimoji="0" lang="ko-KR" altLang="ko-KR" sz="1800" b="1" i="0" u="none" strike="noStrike" cap="none" normalizeH="0" baseline="0" smtClean="0">
+                <a:ln>
+                  <a:noFill/>
+                </a:ln>
+                <a:solidFill>
+                  <a:schemeClr val="tx1"/>
+                </a:solidFill>
+                <a:effectLst/>
+                <a:latin typeface="Arial" panose="020B0604020202020204" pitchFamily="34" charset="0"/>
+              </a:rPr>
+              <a:t>급한 곡선:</a:t>
+            </a:r>
+            <a:r>
+              <a:rPr kumimoji="0" lang="ko-KR" altLang="ko-KR" sz="1800" b="0" i="0" u="none" strike="noStrike" cap="none" normalizeH="0" baseline="0" smtClean="0">
+                <a:ln>
+                  <a:noFill/>
+                </a:ln>
+                <a:solidFill>
+                  <a:schemeClr val="tx1"/>
+                </a:solidFill>
+                <a:effectLst/>
+                <a:latin typeface="Arial" panose="020B0604020202020204" pitchFamily="34" charset="0"/>
+              </a:rPr>
+              <a:t> 반복 플레이 증가, 콘텐츠 소모 속도 감소 </a:t>
+            </a:r>
+          </a:p>
+          <a:p>
+            <a:pPr marL="0" marR="0" lvl="0" indent="0" algn="l" defTabSz="914400" rtl="0" eaLnBrk="0" fontAlgn="base" latinLnBrk="0" hangingPunct="0">
+              <a:lnSpc>
+                <a:spcPct val="100000"/>
+              </a:lnSpc>
+              <a:spcBef>
+                <a:spcPct val="0"/>
+              </a:spcBef>
+              <a:spcAft>
+                <a:spcPct val="0"/>
+              </a:spcAft>
+              <a:buClrTx/>
+              <a:buSzTx/>
+              <a:buFontTx/>
+              <a:buChar char="•"/>
+              <a:tabLst>
+                <a:tab pos="4306888" algn="l"/>
+              </a:tabLst>
+            </a:pPr>
+            <a:r>
+              <a:rPr kumimoji="0" lang="ko-KR" altLang="ko-KR" sz="1800" b="1" i="0" u="none" strike="noStrike" cap="none" normalizeH="0" baseline="0" smtClean="0">
+                <a:ln>
+                  <a:noFill/>
+                </a:ln>
+                <a:solidFill>
+                  <a:schemeClr val="tx1"/>
+                </a:solidFill>
+                <a:effectLst/>
+                <a:latin typeface="Arial" panose="020B0604020202020204" pitchFamily="34" charset="0"/>
+              </a:rPr>
+              <a:t>완만한 곡선:</a:t>
+            </a:r>
+            <a:r>
+              <a:rPr kumimoji="0" lang="ko-KR" altLang="ko-KR" sz="1800" b="0" i="0" u="none" strike="noStrike" cap="none" normalizeH="0" baseline="0" smtClean="0">
+                <a:ln>
+                  <a:noFill/>
+                </a:ln>
+                <a:solidFill>
+                  <a:schemeClr val="tx1"/>
+                </a:solidFill>
+                <a:effectLst/>
+                <a:latin typeface="Arial" panose="020B0604020202020204" pitchFamily="34" charset="0"/>
+              </a:rPr>
+              <a:t> 반복 플레이 감소, 콘텐츠 소모 </a:t>
+            </a:r>
+            <a:r>
+              <a:rPr kumimoji="0" lang="ko-KR" altLang="ko-KR" sz="1800" b="0" i="0" u="none" strike="noStrike" cap="none" normalizeH="0" baseline="0" smtClean="0">
+                <a:ln>
+                  <a:noFill/>
+                </a:ln>
+                <a:solidFill>
+                  <a:schemeClr val="tx1"/>
+                </a:solidFill>
+                <a:effectLst/>
+                <a:latin typeface="Arial" panose="020B0604020202020204" pitchFamily="34" charset="0"/>
+              </a:rPr>
+              <a:t>속도 </a:t>
+            </a:r>
+            <a:r>
+              <a:rPr kumimoji="0" lang="ko-KR" altLang="ko-KR" sz="1800" b="0" i="0" u="none" strike="noStrike" cap="none" normalizeH="0" baseline="0" smtClean="0">
+                <a:ln>
+                  <a:noFill/>
+                </a:ln>
+                <a:solidFill>
+                  <a:schemeClr val="tx1"/>
+                </a:solidFill>
+                <a:effectLst/>
+                <a:latin typeface="Arial" panose="020B0604020202020204" pitchFamily="34" charset="0"/>
+              </a:rPr>
+              <a:t>증가</a:t>
+            </a:r>
+            <a:endParaRPr kumimoji="0" lang="en-US" altLang="ko-KR" sz="1800" b="0" i="0" u="none" strike="noStrike" cap="none" normalizeH="0" baseline="0" smtClean="0">
+              <a:ln>
+                <a:noFill/>
+              </a:ln>
+              <a:solidFill>
+                <a:schemeClr val="tx1"/>
+              </a:solidFill>
+              <a:effectLst/>
+              <a:latin typeface="Arial" panose="020B0604020202020204" pitchFamily="34" charset="0"/>
+            </a:endParaRPr>
+          </a:p>
+          <a:p>
+            <a:pPr marL="0" marR="0" lvl="0" indent="0" algn="l" defTabSz="914400" rtl="0" eaLnBrk="0" fontAlgn="base" latinLnBrk="0" hangingPunct="0">
+              <a:lnSpc>
+                <a:spcPct val="100000"/>
+              </a:lnSpc>
+              <a:spcBef>
+                <a:spcPct val="0"/>
+              </a:spcBef>
+              <a:spcAft>
+                <a:spcPct val="0"/>
+              </a:spcAft>
+              <a:buClrTx/>
+              <a:buSzTx/>
+              <a:buFontTx/>
+              <a:buChar char="•"/>
+              <a:tabLst>
+                <a:tab pos="4306888" algn="l"/>
+              </a:tabLst>
+            </a:pPr>
+            <a:endParaRPr lang="en-US" altLang="ko-KR">
+              <a:latin typeface="Arial" panose="020B0604020202020204" pitchFamily="34" charset="0"/>
+            </a:endParaRPr>
+          </a:p>
+          <a:p>
+            <a:pPr lvl="0" eaLnBrk="0" fontAlgn="base" latinLnBrk="0" hangingPunct="0">
+              <a:spcBef>
+                <a:spcPct val="0"/>
+              </a:spcBef>
+              <a:spcAft>
+                <a:spcPct val="0"/>
+              </a:spcAft>
+              <a:buFontTx/>
+              <a:buChar char="•"/>
+              <a:tabLst>
+                <a:tab pos="4306888" algn="l"/>
+              </a:tabLst>
+            </a:pPr>
+            <a:r>
+              <a:rPr lang="ko-KR" altLang="en-US"/>
+              <a:t>경험치가 콘텐츠 해금의 주요 조건일 때 성립하는 설명</a:t>
+            </a:r>
+            <a:r>
+              <a:rPr kumimoji="0" lang="ko-KR" altLang="ko-KR" sz="1800" b="0" i="0" u="none" strike="noStrike" cap="none" normalizeH="0" baseline="0" smtClean="0">
+                <a:ln>
+                  <a:noFill/>
+                </a:ln>
+                <a:solidFill>
+                  <a:schemeClr val="tx1"/>
+                </a:solidFill>
+                <a:effectLst/>
+                <a:latin typeface="Arial" panose="020B0604020202020204" pitchFamily="34" charset="0"/>
+              </a:rPr>
+              <a:t> </a:t>
+            </a:r>
+            <a:endParaRPr kumimoji="0" lang="ko-KR" altLang="ko-KR" sz="1800" b="0" i="0" u="none" strike="noStrike" cap="none" normalizeH="0" baseline="0" smtClean="0">
+              <a:ln>
+                <a:noFill/>
+              </a:ln>
+              <a:solidFill>
+                <a:schemeClr val="tx1"/>
+              </a:solidFill>
+              <a:effectLst/>
+              <a:latin typeface="Arial" panose="020B0604020202020204" pitchFamily="34" charset="0"/>
+            </a:endParaRPr>
+          </a:p>
+        </p:txBody>
+      </p:sp>
     </p:spTree>
     <p:extLst>
       <p:ext uri="{BB962C8B-B14F-4D97-AF65-F5344CB8AC3E}">
@@ -3879,6 +4197,259 @@
     <p:extLst>
       <p:ext uri="{BB962C8B-B14F-4D97-AF65-F5344CB8AC3E}">
         <p14:creationId xmlns:p14="http://schemas.microsoft.com/office/powerpoint/2010/main" val="3771370353"/>
+      </p:ext>
+    </p:extLst>
+  </p:cSld>
+  <p:clrMapOvr>
+    <a:masterClrMapping/>
+  </p:clrMapOvr>
+</p:sld>
+</file>
+
+<file path=ppt/slides/slide9.xml><?xml version="1.0" encoding="utf-8"?>
+<p:sld xmlns:a="http://schemas.openxmlformats.org/drawingml/2006/main" xmlns:r="http://schemas.openxmlformats.org/officeDocument/2006/relationships" xmlns:p="http://schemas.openxmlformats.org/presentationml/2006/main">
+  <p:cSld>
+    <p:spTree>
+      <p:nvGrpSpPr>
+        <p:cNvPr id="1" name=""/>
+        <p:cNvGrpSpPr/>
+        <p:nvPr/>
+      </p:nvGrpSpPr>
+      <p:grpSpPr>
+        <a:xfrm>
+          <a:off x="0" y="0"/>
+          <a:ext cx="0" cy="0"/>
+          <a:chOff x="0" y="0"/>
+          <a:chExt cx="0" cy="0"/>
+        </a:xfrm>
+      </p:grpSpPr>
+      <p:sp>
+        <p:nvSpPr>
+          <p:cNvPr id="2" name="제목 1"/>
+          <p:cNvSpPr>
+            <a:spLocks noGrp="1"/>
+          </p:cNvSpPr>
+          <p:nvPr>
+            <p:ph type="title"/>
+          </p:nvPr>
+        </p:nvSpPr>
+        <p:spPr/>
+        <p:txBody>
+          <a:bodyPr/>
+          <a:lstStyle/>
+          <a:p>
+            <a:endParaRPr lang="ko-KR" altLang="en-US"/>
+          </a:p>
+        </p:txBody>
+      </p:sp>
+      <p:sp>
+        <p:nvSpPr>
+          <p:cNvPr id="4" name="Rectangle 1"/>
+          <p:cNvSpPr>
+            <a:spLocks noGrp="1" noChangeArrowheads="1"/>
+          </p:cNvSpPr>
+          <p:nvPr>
+            <p:ph idx="1"/>
+          </p:nvPr>
+        </p:nvSpPr>
+        <p:spPr bwMode="auto">
+          <a:xfrm>
+            <a:off x="838200" y="3539629"/>
+            <a:ext cx="9661619" cy="923330"/>
+          </a:xfrm>
+          <a:prstGeom prst="rect">
+            <a:avLst/>
+          </a:prstGeom>
+          <a:noFill/>
+          <a:ln>
+            <a:noFill/>
+          </a:ln>
+          <a:effectLst/>
+          <a:extLst>
+            <a:ext uri="{909E8E84-426E-40DD-AFC4-6F175D3DCCD1}">
+              <a14:hiddenFill xmlns:a14="http://schemas.microsoft.com/office/drawing/2010/main">
+                <a:solidFill>
+                  <a:schemeClr val="accent1"/>
+                </a:solidFill>
+              </a14:hiddenFill>
+            </a:ext>
+            <a:ext uri="{91240B29-F687-4F45-9708-019B960494DF}">
+              <a14:hiddenLine xmlns:a14="http://schemas.microsoft.com/office/drawing/2010/main" w="9525">
+                <a:solidFill>
+                  <a:schemeClr val="tx1"/>
+                </a:solidFill>
+                <a:miter lim="800000"/>
+                <a:headEnd/>
+                <a:tailEnd/>
+              </a14:hiddenLine>
+            </a:ext>
+            <a:ext uri="{AF507438-7753-43E0-B8FC-AC1667EBCBE1}">
+              <a14:hiddenEffects xmlns:a14="http://schemas.microsoft.com/office/drawing/2010/main">
+                <a:effectLst>
+                  <a:outerShdw dist="35921" dir="2700000" algn="ctr" rotWithShape="0">
+                    <a:schemeClr val="bg2"/>
+                  </a:outerShdw>
+                </a:effectLst>
+              </a14:hiddenEffects>
+            </a:ext>
+          </a:extLst>
+        </p:spPr>
+        <p:txBody>
+          <a:bodyPr vert="horz" wrap="none" lIns="91440" tIns="45720" rIns="91440" bIns="45720" numCol="1" anchor="ctr" anchorCtr="0" compatLnSpc="1">
+            <a:prstTxWarp prst="textNoShape">
+              <a:avLst/>
+            </a:prstTxWarp>
+            <a:spAutoFit/>
+          </a:bodyPr>
+          <a:lstStyle/>
+          <a:p>
+            <a:pPr marL="0" marR="0" lvl="0" indent="0" algn="l" defTabSz="914400" rtl="0" eaLnBrk="0" fontAlgn="base" latinLnBrk="0" hangingPunct="0">
+              <a:lnSpc>
+                <a:spcPct val="100000"/>
+              </a:lnSpc>
+              <a:spcBef>
+                <a:spcPct val="0"/>
+              </a:spcBef>
+              <a:spcAft>
+                <a:spcPct val="0"/>
+              </a:spcAft>
+              <a:buClrTx/>
+              <a:buSzTx/>
+              <a:buFontTx/>
+              <a:buNone/>
+              <a:tabLst/>
+            </a:pPr>
+            <a:r>
+              <a:rPr kumimoji="0" lang="ko-KR" altLang="ko-KR" sz="1800" b="0" i="0" u="none" strike="noStrike" cap="none" normalizeH="0" baseline="0" smtClean="0">
+                <a:ln>
+                  <a:noFill/>
+                </a:ln>
+                <a:solidFill>
+                  <a:schemeClr val="tx1"/>
+                </a:solidFill>
+                <a:effectLst/>
+                <a:latin typeface="Arial" panose="020B0604020202020204" pitchFamily="34" charset="0"/>
+              </a:rPr>
+              <a:t>우리 게임의 곡선은:</a:t>
+            </a:r>
+          </a:p>
+          <a:p>
+            <a:pPr marL="0" marR="0" lvl="0" indent="0" algn="l" defTabSz="914400" rtl="0" eaLnBrk="0" fontAlgn="base" latinLnBrk="0" hangingPunct="0">
+              <a:lnSpc>
+                <a:spcPct val="100000"/>
+              </a:lnSpc>
+              <a:spcBef>
+                <a:spcPct val="0"/>
+              </a:spcBef>
+              <a:spcAft>
+                <a:spcPct val="0"/>
+              </a:spcAft>
+              <a:buClrTx/>
+              <a:buSzTx/>
+              <a:buFontTx/>
+              <a:buNone/>
+              <a:tabLst/>
+            </a:pPr>
+            <a:r>
+              <a:rPr kumimoji="0" lang="ko-KR" altLang="ko-KR" sz="1800" b="0" i="0" u="none" strike="noStrike" cap="none" normalizeH="0" baseline="0" smtClean="0">
+                <a:ln>
+                  <a:noFill/>
+                </a:ln>
+                <a:solidFill>
+                  <a:schemeClr val="tx1"/>
+                </a:solidFill>
+                <a:effectLst/>
+                <a:latin typeface="Arial" panose="020B0604020202020204" pitchFamily="34" charset="0"/>
+              </a:rPr>
+              <a:t>플레이어가 콘텐츠를 얼마나 반복해야 하는지를 보여주는 곡선이 아니라, 각 </a:t>
+            </a:r>
+            <a:r>
+              <a:rPr kumimoji="0" lang="ko-KR" altLang="ko-KR" sz="1800" b="0" i="0" u="none" strike="noStrike" cap="none" normalizeH="0" baseline="0" smtClean="0">
+                <a:ln>
+                  <a:noFill/>
+                </a:ln>
+                <a:solidFill>
+                  <a:schemeClr val="tx1"/>
+                </a:solidFill>
+                <a:effectLst/>
+                <a:latin typeface="Arial" panose="020B0604020202020204" pitchFamily="34" charset="0"/>
+              </a:rPr>
+              <a:t>스토리 </a:t>
+            </a:r>
+            <a:r>
+              <a:rPr kumimoji="0" lang="ko-KR" altLang="ko-KR" sz="1800" b="0" i="0" u="none" strike="noStrike" cap="none" normalizeH="0" baseline="0" smtClean="0">
+                <a:ln>
+                  <a:noFill/>
+                </a:ln>
+                <a:solidFill>
+                  <a:schemeClr val="tx1"/>
+                </a:solidFill>
+                <a:effectLst/>
+                <a:latin typeface="Arial" panose="020B0604020202020204" pitchFamily="34" charset="0"/>
+              </a:rPr>
+              <a:t>콘텐츠가</a:t>
+            </a:r>
+            <a:endParaRPr kumimoji="0" lang="en-US" altLang="ko-KR" sz="1800" b="0" i="0" u="none" strike="noStrike" cap="none" normalizeH="0" baseline="0" smtClean="0">
+              <a:ln>
+                <a:noFill/>
+              </a:ln>
+              <a:solidFill>
+                <a:schemeClr val="tx1"/>
+              </a:solidFill>
+              <a:effectLst/>
+              <a:latin typeface="Arial" panose="020B0604020202020204" pitchFamily="34" charset="0"/>
+            </a:endParaRPr>
+          </a:p>
+          <a:p>
+            <a:pPr marL="0" marR="0" lvl="0" indent="0" algn="l" defTabSz="914400" rtl="0" eaLnBrk="0" fontAlgn="base" latinLnBrk="0" hangingPunct="0">
+              <a:lnSpc>
+                <a:spcPct val="100000"/>
+              </a:lnSpc>
+              <a:spcBef>
+                <a:spcPct val="0"/>
+              </a:spcBef>
+              <a:spcAft>
+                <a:spcPct val="0"/>
+              </a:spcAft>
+              <a:buClrTx/>
+              <a:buSzTx/>
+              <a:buFontTx/>
+              <a:buNone/>
+              <a:tabLst/>
+            </a:pPr>
+            <a:r>
+              <a:rPr kumimoji="0" lang="ko-KR" altLang="ko-KR" sz="1800" b="0" i="0" u="none" strike="noStrike" cap="none" normalizeH="0" baseline="0" smtClean="0">
+                <a:ln>
+                  <a:noFill/>
+                </a:ln>
+                <a:solidFill>
+                  <a:schemeClr val="tx1"/>
+                </a:solidFill>
+                <a:effectLst/>
+                <a:latin typeface="Arial" panose="020B0604020202020204" pitchFamily="34" charset="0"/>
+              </a:rPr>
+              <a:t>전체 </a:t>
+            </a:r>
+            <a:r>
+              <a:rPr kumimoji="0" lang="ko-KR" altLang="ko-KR" sz="1800" b="0" i="0" u="none" strike="noStrike" cap="none" normalizeH="0" baseline="0" smtClean="0">
+                <a:ln>
+                  <a:noFill/>
+                </a:ln>
+                <a:solidFill>
+                  <a:schemeClr val="tx1"/>
+                </a:solidFill>
+                <a:effectLst/>
+                <a:latin typeface="Arial" panose="020B0604020202020204" pitchFamily="34" charset="0"/>
+              </a:rPr>
+              <a:t>진행에서 어느 정도의 비중을 가지는지를 보여주는 곡선</a:t>
+            </a:r>
+          </a:p>
+        </p:txBody>
+      </p:sp>
+    </p:spTree>
+    <p:extLst>
+      <p:ext uri="{BB962C8B-B14F-4D97-AF65-F5344CB8AC3E}">
+        <p14:creationId xmlns:p14="http://schemas.microsoft.com/office/powerpoint/2010/main" val="3948437539"/>
       </p:ext>
     </p:extLst>
   </p:cSld>
